--- a/10-Knowledge-Products/KP4-DSD/videos/module_1/en/decks/KP4_M1_1.5_Deck_v0.1.pptx
+++ b/10-Knowledge-Products/KP4-DSD/videos/module_1/en/decks/KP4_M1_1.5_Deck_v0.1.pptx
@@ -14,6 +14,7 @@
     <p:handoutMasterId r:id="rId47"/>
   </p:handoutMasterIdLst>
   <p:sldIdLst>
+    <p:sldId id="2728" r:id="rId13"/>
     <p:sldId id="2729" r:id="rId12"/>
     <p:sldId id="2730" r:id="rId11"/>
     <p:sldId id="2731" r:id="rId10"/>
@@ -21,7 +22,6 @@
     <p:sldId id="2733" r:id="rId55"/>
     <p:sldId id="2734" r:id="rId56"/>
     <p:sldId id="2735" r:id="rId57"/>
-    <p:sldId id="2736" r:id="rId58"/>
   </p:sldIdLst>
   <p:sldSz cx="12192000" cy="6858000"/>
   <p:notesSz cx="6858000" cy="9144000"/>
@@ -888,6 +888,76 @@
 </p:notesMaster>
 </file>
 
+<file path=ppt/notesSlides/notesSlide35.xml><?xml version="1.0" encoding="utf-8"?>
+<p:notes xmlns:a="http://schemas.openxmlformats.org/drawingml/2006/main" xmlns:p="http://schemas.openxmlformats.org/presentationml/2006/main" xmlns:r="http://schemas.openxmlformats.org/officeDocument/2006/relationships">
+  <p:cSld>
+    <p:spTree>
+      <p:nvGrpSpPr>
+        <p:cNvPr id="1" name=""/>
+        <p:cNvGrpSpPr/>
+        <p:nvPr/>
+      </p:nvGrpSpPr>
+      <p:grpSpPr>
+        <a:xfrm>
+          <a:off x="0" y="0"/>
+          <a:ext cx="0" cy="0"/>
+          <a:chOff x="0" y="0"/>
+          <a:chExt cx="0" cy="0"/>
+        </a:xfrm>
+      </p:grpSpPr>
+      <p:sp>
+        <p:nvSpPr>
+          <p:cNvPr id="2" name="Slide Image Placeholder 1"/>
+          <p:cNvSpPr>
+            <a:spLocks noGrp="1"/>
+          </p:cNvSpPr>
+          <p:nvPr>
+            <p:ph type="sldImg" idx="2"/>
+          </p:nvPr>
+        </p:nvSpPr>
+        <p:spPr/>
+      </p:sp>
+      <p:sp>
+        <p:nvSpPr>
+          <p:cNvPr id="3" name="Notes Placeholder 2"/>
+          <p:cNvSpPr>
+            <a:spLocks noGrp="1"/>
+          </p:cNvSpPr>
+          <p:nvPr>
+            <p:ph type="body" idx="3" sz="quarter"/>
+          </p:nvPr>
+        </p:nvSpPr>
+        <p:spPr/>
+        <p:txBody>
+          <a:bodyPr/>
+          <a:lstStyle/>
+          <a:p>
+            <a:r>
+              <a:t>Title card — the cold open. The hosts name the module, the video number, the title and the single message on this slide; no scripted narration. Hold until the opener begins; the opener is narrated on the next slide.</a:t>
+            </a:r>
+          </a:p>
+        </p:txBody>
+      </p:sp>
+      <p:sp>
+        <p:nvSpPr>
+          <p:cNvPr id="4" name="Slide Number Placeholder 3"/>
+          <p:cNvSpPr>
+            <a:spLocks noGrp="1"/>
+          </p:cNvSpPr>
+          <p:nvPr>
+            <p:ph type="sldNum" idx="5" sz="quarter"/>
+          </p:nvPr>
+        </p:nvSpPr>
+        <p:spPr/>
+      </p:sp>
+    </p:spTree>
+  </p:cSld>
+  <p:clrMapOvr>
+    <a:masterClrMapping/>
+  </p:clrMapOvr>
+</p:notes>
+</file>
+
 <file path=ppt/notesSlides/notesSlide36.xml><?xml version="1.0" encoding="utf-8"?>
 <p:notes xmlns:a="http://schemas.openxmlformats.org/drawingml/2006/main" xmlns:p="http://schemas.openxmlformats.org/presentationml/2006/main" xmlns:r="http://schemas.openxmlformats.org/officeDocument/2006/relationships">
   <p:cSld>
@@ -933,7 +1003,7 @@
           <a:lstStyle/>
           <a:p>
             <a:r>
-              <a:t>Title card — the cold open. The hosts name the module, the video number, the title and the single message on this slide; no scripted narration. Hold until the opener begins; the opener is narrated on the next slide.</a:t>
+              <a:t>VO: An AI assistant can draft a register of requirements in an afternoon. That is real help. It also raises a question your minister will ask: if a machine wrote it, who is answerable for it?</a:t>
             </a:r>
           </a:p>
         </p:txBody>
@@ -1003,7 +1073,13 @@
           <a:lstStyle/>
           <a:p>
             <a:r>
-              <a:t>VO: An AI assistant can draft a register of requirements in an afternoon. That is real help. It also raises a question your minister will ask: if a machine wrote it, who is answerable for it?</a:t>
+              <a:t>VO: The SDD method's answer is simple. An AI assistant may draft any document a person would otherwise draft. It proposes; it never decides. A named person rules on each thing it proposes, and says one of three words: accepted, amended or set aside. The document then holds only what that person accepted, in that person's words. A draft is never accepted because it reads well. It is accepted line by line, by somebody whose name is on it, and who can be asked about it later.</a:t>
+            </a:r>
+          </a:p>
+          <a:p/>
+          <a:p>
+            <a:r>
+              <a:t>Slide specification: The three words in bold body text. Text-only.</a:t>
             </a:r>
           </a:p>
         </p:txBody>
@@ -1073,13 +1149,13 @@
           <a:lstStyle/>
           <a:p>
             <a:r>
-              <a:t>VO: The SDD method's answer is simple. An AI assistant may draft any document a person would otherwise draft. It proposes; it never decides. A named person rules on each thing it proposes, and says one of three words: accepted, amended or set aside. The document then holds only what that person accepted, in that person's words. A draft is never accepted because it reads well. It is accepted line by line, by somebody whose name is on it, and who can be asked about it later.</a:t>
+              <a:t>VO: Inventing something plausible is the thing an assistant does best. So the method binds it with one rule: a gap is recorded as a question with an owner, and never filled with an invented answer. When an official's text is silent, the assistant does not guess a figure to keep the work moving. It writes the question down, and a person decides who must answer it and by when. Every invented answer it avoids is one less fault hidden in the service.</a:t>
             </a:r>
           </a:p>
           <a:p/>
           <a:p>
             <a:r>
-              <a:t>Slide specification: The three words in bold body text. Text-only.</a:t>
+              <a:t>Slide specification: Text-only.</a:t>
             </a:r>
           </a:p>
         </p:txBody>
@@ -1149,13 +1225,13 @@
           <a:lstStyle/>
           <a:p>
             <a:r>
-              <a:t>VO: Inventing something plausible is the thing an assistant does best. So the method binds it with one rule: a gap is recorded as a question with an owner, and never filled with an invented answer. When an official's text is silent, the assistant does not guess a figure to keep the work moving. It writes the question down, and a person decides who must answer it and by when. Every invented answer it avoids is one less fault hidden in the service.</a:t>
+              <a:t>VO: For each of the twelve documents, three roles are named. Someone writes it. Someone else checks it. And a named person accepts it. In PHEQA's project in Progressa, the supplier's analyst and an AI assistant write. A second analyst of the supplier checks. The Registrar of PHEQA accepts, or the head of PHEQA's ICT unit for the technical documents. And the head of the registration desk sits at every review of something an officer will use.</a:t>
             </a:r>
           </a:p>
           <a:p/>
           <a:p>
             <a:r>
-              <a:t>Slide specification: Text-only.</a:t>
+              <a:t>Slide specification: Text-only. No picture of a person or a robot.</a:t>
             </a:r>
           </a:p>
         </p:txBody>
@@ -1225,13 +1301,13 @@
           <a:lstStyle/>
           <a:p>
             <a:r>
-              <a:t>VO: For each of the twelve documents, three roles are named. Someone writes it. Someone else checks it. And a named person accepts it. In PHEQA's project in Progressa, the supplier's analyst and an AI assistant write. A second analyst of the supplier checks. The Registrar of PHEQA accepts, or the head of PHEQA's ICT unit for the technical documents. And the head of the registration desk sits at every review of something an officer will use.</a:t>
+              <a:t>VO: In four of PHEQA's documents, an AI assistant does the writing. It extracts the register of what was asked. It helps write the shared settings and lists. It drafts each goal as a story. And it writes the application model, the file a program reads, under the rule that it must refuse to guess. In each of the four, a named person rules on what it wrote, and a different named person accepts it: the Registrar, the owner of each setting, or the head of the ICT unit.</a:t>
             </a:r>
           </a:p>
           <a:p/>
           <a:p>
             <a:r>
-              <a:t>Slide specification: Text-only. No picture of a person or a robot.</a:t>
+              <a:t>Slide specification: An extract of the table of the worked example; the full table of twelve is in the written guide. Progressa's names as the plan gives them.</a:t>
             </a:r>
           </a:p>
         </p:txBody>
@@ -1301,13 +1377,13 @@
           <a:lstStyle/>
           <a:p>
             <a:r>
-              <a:t>VO: In four of PHEQA's documents, an AI assistant does the writing. It extracts the register of what was asked. It helps write the shared settings and lists. It drafts each goal as a story. And it writes the application model, the file a program reads, under the rule that it must refuse to guess. In each of the four, a named person rules on what it wrote, and a different named person accepts it: the Registrar, the owner of each setting, or the head of the ICT unit.</a:t>
+              <a:t>VO: Ask your supplier for this table before the first document is written, and check three things. No row ends with the assistant. In no row does the writer accept alone: where a writer sits at a review, as the owner of the screens does, two other people must agree. And at every review of something an officer will use, the person who will live with the result sits beside the owner and the builder. If a cell under 'accepts' names the supplier, or names nobody, that decision has not been given to anyone in your organisation.</a:t>
             </a:r>
           </a:p>
           <a:p/>
           <a:p>
             <a:r>
-              <a:t>Slide specification: An extract of the table of the worked example; the full table of twelve is in the written guide. Progressa's names as the plan gives them.</a:t>
+              <a:t>Slide specification: Text-only.</a:t>
             </a:r>
           </a:p>
         </p:txBody>
@@ -1333,82 +1409,6 @@
 </file>
 
 <file path=ppt/notesSlides/notesSlide42.xml><?xml version="1.0" encoding="utf-8"?>
-<p:notes xmlns:a="http://schemas.openxmlformats.org/drawingml/2006/main" xmlns:p="http://schemas.openxmlformats.org/presentationml/2006/main" xmlns:r="http://schemas.openxmlformats.org/officeDocument/2006/relationships">
-  <p:cSld>
-    <p:spTree>
-      <p:nvGrpSpPr>
-        <p:cNvPr id="1" name=""/>
-        <p:cNvGrpSpPr/>
-        <p:nvPr/>
-      </p:nvGrpSpPr>
-      <p:grpSpPr>
-        <a:xfrm>
-          <a:off x="0" y="0"/>
-          <a:ext cx="0" cy="0"/>
-          <a:chOff x="0" y="0"/>
-          <a:chExt cx="0" cy="0"/>
-        </a:xfrm>
-      </p:grpSpPr>
-      <p:sp>
-        <p:nvSpPr>
-          <p:cNvPr id="2" name="Slide Image Placeholder 1"/>
-          <p:cNvSpPr>
-            <a:spLocks noGrp="1"/>
-          </p:cNvSpPr>
-          <p:nvPr>
-            <p:ph type="sldImg" idx="2"/>
-          </p:nvPr>
-        </p:nvSpPr>
-        <p:spPr/>
-      </p:sp>
-      <p:sp>
-        <p:nvSpPr>
-          <p:cNvPr id="3" name="Notes Placeholder 2"/>
-          <p:cNvSpPr>
-            <a:spLocks noGrp="1"/>
-          </p:cNvSpPr>
-          <p:nvPr>
-            <p:ph type="body" idx="3" sz="quarter"/>
-          </p:nvPr>
-        </p:nvSpPr>
-        <p:spPr/>
-        <p:txBody>
-          <a:bodyPr/>
-          <a:lstStyle/>
-          <a:p>
-            <a:r>
-              <a:t>VO: Ask your supplier for this table before the first document is written, and check three things. No row ends with the assistant. In no row does the writer accept alone: where a writer sits at a review, as the owner of the screens does, two other people must agree. And at every review of something an officer will use, the person who will live with the result sits beside the owner and the builder. If a cell under 'accepts' names the supplier, or names nobody, that decision has not been given to anyone in your organisation.</a:t>
-            </a:r>
-          </a:p>
-          <a:p/>
-          <a:p>
-            <a:r>
-              <a:t>Slide specification: Text-only.</a:t>
-            </a:r>
-          </a:p>
-        </p:txBody>
-      </p:sp>
-      <p:sp>
-        <p:nvSpPr>
-          <p:cNvPr id="4" name="Slide Number Placeholder 3"/>
-          <p:cNvSpPr>
-            <a:spLocks noGrp="1"/>
-          </p:cNvSpPr>
-          <p:nvPr>
-            <p:ph type="sldNum" idx="5" sz="quarter"/>
-          </p:nvPr>
-        </p:nvSpPr>
-        <p:spPr/>
-      </p:sp>
-    </p:spTree>
-  </p:cSld>
-  <p:clrMapOvr>
-    <a:masterClrMapping/>
-  </p:clrMapOvr>
-</p:notes>
-</file>
-
-<file path=ppt/notesSlides/notesSlide43.xml><?xml version="1.0" encoding="utf-8"?>
 <p:notes xmlns:a="http://schemas.openxmlformats.org/drawingml/2006/main" xmlns:p="http://schemas.openxmlformats.org/presentationml/2006/main" xmlns:r="http://schemas.openxmlformats.org/officeDocument/2006/relationships">
   <p:cSld>
     <p:spTree>
@@ -11626,6 +11626,194 @@
 </p:sldMaster>
 </file>
 
+<file path=ppt/slides/slide35.xml><?xml version="1.0" encoding="utf-8"?>
+<p:sld xmlns:a="http://schemas.openxmlformats.org/drawingml/2006/main" xmlns:p="http://schemas.openxmlformats.org/presentationml/2006/main" xmlns:r="http://schemas.openxmlformats.org/officeDocument/2006/relationships">
+  <p:cSld>
+    <p:spTree>
+      <p:nvGrpSpPr>
+        <p:cNvPr id="1" name=""/>
+        <p:cNvGrpSpPr/>
+        <p:nvPr/>
+      </p:nvGrpSpPr>
+      <p:grpSpPr/>
+      <p:sp>
+        <p:nvSpPr>
+          <p:cNvPr id="2" name="TextBox 1"/>
+          <p:cNvSpPr txBox="1"/>
+          <p:nvPr/>
+        </p:nvSpPr>
+        <p:spPr>
+          <a:xfrm>
+            <a:off x="822960" y="822960"/>
+            <a:ext cx="7315200" cy="457200"/>
+          </a:xfrm>
+          <a:prstGeom prst="rect">
+            <a:avLst/>
+          </a:prstGeom>
+          <a:noFill/>
+        </p:spPr>
+        <p:txBody>
+          <a:bodyPr wrap="square">
+            <a:spAutoFit/>
+          </a:bodyPr>
+          <a:lstStyle/>
+          <a:p>
+            <a:r>
+              <a:rPr sz="1200" b="1" i="0">
+                <a:solidFill>
+                  <a:srgbClr val="595959"/>
+                </a:solidFill>
+                <a:latin typeface="Arial"/>
+              </a:rPr>
+              <a:t>MODULE 1 · VIDEO 1.5</a:t>
+            </a:r>
+          </a:p>
+        </p:txBody>
+      </p:sp>
+      <p:sp>
+        <p:nvSpPr>
+          <p:cNvPr id="3" name="TextBox 2"/>
+          <p:cNvSpPr txBox="1"/>
+          <p:nvPr/>
+        </p:nvSpPr>
+        <p:spPr>
+          <a:xfrm>
+            <a:off x="822960" y="1828800"/>
+            <a:ext cx="2011680" cy="1097280"/>
+          </a:xfrm>
+          <a:prstGeom prst="rect">
+            <a:avLst/>
+          </a:prstGeom>
+          <a:noFill/>
+        </p:spPr>
+        <p:txBody>
+          <a:bodyPr wrap="square">
+            <a:spAutoFit/>
+          </a:bodyPr>
+          <a:lstStyle/>
+          <a:p>
+            <a:r>
+              <a:rPr sz="6000" b="1" i="0">
+                <a:solidFill>
+                  <a:srgbClr val="009CD6"/>
+                </a:solidFill>
+                <a:latin typeface="Arial"/>
+              </a:rPr>
+              <a:t>1.5</a:t>
+            </a:r>
+          </a:p>
+        </p:txBody>
+      </p:sp>
+      <p:sp>
+        <p:nvSpPr>
+          <p:cNvPr id="4" name="TextBox 3"/>
+          <p:cNvSpPr txBox="1"/>
+          <p:nvPr/>
+        </p:nvSpPr>
+        <p:spPr>
+          <a:xfrm>
+            <a:off x="822960" y="2880360"/>
+            <a:ext cx="9601200" cy="1371600"/>
+          </a:xfrm>
+          <a:prstGeom prst="rect">
+            <a:avLst/>
+          </a:prstGeom>
+          <a:noFill/>
+        </p:spPr>
+        <p:txBody>
+          <a:bodyPr wrap="square">
+            <a:spAutoFit/>
+          </a:bodyPr>
+          <a:lstStyle/>
+          <a:p>
+            <a:r>
+              <a:rPr sz="3400" b="1" i="0">
+                <a:solidFill>
+                  <a:srgbClr val="1A1A1A"/>
+                </a:solidFill>
+                <a:latin typeface="Arial"/>
+              </a:rPr>
+              <a:t>Who writes, who checks, who accepts</a:t>
+            </a:r>
+          </a:p>
+        </p:txBody>
+      </p:sp>
+      <p:sp>
+        <p:nvSpPr>
+          <p:cNvPr id="5" name="TextBox 4"/>
+          <p:cNvSpPr txBox="1"/>
+          <p:nvPr/>
+        </p:nvSpPr>
+        <p:spPr>
+          <a:xfrm>
+            <a:off x="822960" y="4343400"/>
+            <a:ext cx="9875520" cy="1554480"/>
+          </a:xfrm>
+          <a:prstGeom prst="rect">
+            <a:avLst/>
+          </a:prstGeom>
+          <a:noFill/>
+        </p:spPr>
+        <p:txBody>
+          <a:bodyPr wrap="square">
+            <a:spAutoFit/>
+          </a:bodyPr>
+          <a:lstStyle/>
+          <a:p>
+            <a:r>
+              <a:rPr sz="1700" b="0" i="1">
+                <a:solidFill>
+                  <a:srgbClr val="595959"/>
+                </a:solidFill>
+                <a:latin typeface="Arial"/>
+              </a:rPr>
+              <a:t>The AI assistant may draft; a named person accepts, amends or sets aside each proposal, and only what was accepted stands.</a:t>
+            </a:r>
+          </a:p>
+        </p:txBody>
+      </p:sp>
+      <p:sp>
+        <p:nvSpPr>
+          <p:cNvPr id="6" name="TextBox 5"/>
+          <p:cNvSpPr txBox="1"/>
+          <p:nvPr/>
+        </p:nvSpPr>
+        <p:spPr>
+          <a:xfrm>
+            <a:off x="822960" y="5989320"/>
+            <a:ext cx="7315200" cy="365760"/>
+          </a:xfrm>
+          <a:prstGeom prst="rect">
+            <a:avLst/>
+          </a:prstGeom>
+          <a:noFill/>
+        </p:spPr>
+        <p:txBody>
+          <a:bodyPr wrap="square">
+            <a:spAutoFit/>
+          </a:bodyPr>
+          <a:lstStyle/>
+          <a:p>
+            <a:r>
+              <a:rPr sz="1200" b="0" i="0">
+                <a:solidFill>
+                  <a:srgbClr val="595959"/>
+                </a:solidFill>
+                <a:latin typeface="Arial"/>
+              </a:rPr>
+              <a:t>standalone video · voice-over on text slides</a:t>
+            </a:r>
+          </a:p>
+        </p:txBody>
+      </p:sp>
+    </p:spTree>
+  </p:cSld>
+  <p:clrMapOvr>
+    <a:masterClrMapping/>
+  </p:clrMapOvr>
+</p:sld>
+</file>
+
 <file path=ppt/slides/slide36.xml><?xml version="1.0" encoding="utf-8"?>
 <p:sld xmlns:a="http://schemas.openxmlformats.org/drawingml/2006/main" xmlns:p="http://schemas.openxmlformats.org/presentationml/2006/main" xmlns:r="http://schemas.openxmlformats.org/officeDocument/2006/relationships">
   <p:cSld>
@@ -11644,8 +11832,8 @@
         </p:nvSpPr>
         <p:spPr>
           <a:xfrm>
-            <a:off x="822960" y="822960"/>
-            <a:ext cx="7315200" cy="457200"/>
+            <a:off x="1005840" y="1325880"/>
+            <a:ext cx="5486400" cy="365760"/>
           </a:xfrm>
           <a:prstGeom prst="rect">
             <a:avLst/>
@@ -11660,128 +11848,115 @@
           <a:p>
             <a:r>
               <a:rPr sz="1200" b="1" i="0">
+                <a:solidFill>
+                  <a:srgbClr val="006E96"/>
+                </a:solidFill>
+                <a:latin typeface="Arial"/>
+              </a:rPr>
+              <a:t>WHERE WE START</a:t>
+            </a:r>
+          </a:p>
+        </p:txBody>
+      </p:sp>
+      <p:sp>
+        <p:nvSpPr>
+          <p:cNvPr id="3" name="TextBox 2"/>
+          <p:cNvSpPr txBox="1"/>
+          <p:nvPr/>
+        </p:nvSpPr>
+        <p:spPr>
+          <a:xfrm>
+            <a:off x="1005840" y="1783080"/>
+            <a:ext cx="10149840" cy="1737360"/>
+          </a:xfrm>
+          <a:prstGeom prst="rect">
+            <a:avLst/>
+          </a:prstGeom>
+          <a:noFill/>
+        </p:spPr>
+        <p:txBody>
+          <a:bodyPr wrap="square">
+            <a:spAutoFit/>
+          </a:bodyPr>
+          <a:lstStyle/>
+          <a:p>
+            <a:r>
+              <a:rPr sz="3000" b="1" i="0">
+                <a:solidFill>
+                  <a:srgbClr val="1A1A1A"/>
+                </a:solidFill>
+                <a:latin typeface="Arial"/>
+              </a:rPr>
+              <a:t>If a machine wrote it, who is answerable for it?</a:t>
+            </a:r>
+          </a:p>
+        </p:txBody>
+      </p:sp>
+      <p:sp>
+        <p:nvSpPr>
+          <p:cNvPr id="4" name="TextBox 3"/>
+          <p:cNvSpPr txBox="1"/>
+          <p:nvPr/>
+        </p:nvSpPr>
+        <p:spPr>
+          <a:xfrm>
+            <a:off x="1005840" y="3611880"/>
+            <a:ext cx="10149840" cy="2377440"/>
+          </a:xfrm>
+          <a:prstGeom prst="rect">
+            <a:avLst/>
+          </a:prstGeom>
+          <a:noFill/>
+        </p:spPr>
+        <p:txBody>
+          <a:bodyPr wrap="square">
+            <a:spAutoFit/>
+          </a:bodyPr>
+          <a:lstStyle/>
+          <a:p>
+            <a:pPr>
+              <a:spcAft>
+                <a:spcPts val="800"/>
+              </a:spcAft>
+            </a:pPr>
+            <a:r>
+              <a:rPr sz="1700" b="0" i="0">
                 <a:solidFill>
                   <a:srgbClr val="595959"/>
                 </a:solidFill>
                 <a:latin typeface="Arial"/>
               </a:rPr>
-              <a:t>MODULE 1 · VIDEO 1.5</a:t>
-            </a:r>
-          </a:p>
-        </p:txBody>
-      </p:sp>
-      <p:sp>
-        <p:nvSpPr>
-          <p:cNvPr id="3" name="TextBox 2"/>
-          <p:cNvSpPr txBox="1"/>
-          <p:nvPr/>
-        </p:nvSpPr>
-        <p:spPr>
-          <a:xfrm>
-            <a:off x="822960" y="1828800"/>
-            <a:ext cx="2011680" cy="1097280"/>
-          </a:xfrm>
-          <a:prstGeom prst="rect">
-            <a:avLst/>
-          </a:prstGeom>
-          <a:noFill/>
-        </p:spPr>
-        <p:txBody>
-          <a:bodyPr wrap="square">
-            <a:spAutoFit/>
-          </a:bodyPr>
-          <a:lstStyle/>
-          <a:p>
-            <a:r>
-              <a:rPr sz="6000" b="1" i="0">
-                <a:solidFill>
-                  <a:srgbClr val="009CD6"/>
-                </a:solidFill>
-                <a:latin typeface="Arial"/>
-              </a:rPr>
-              <a:t>1.5</a:t>
-            </a:r>
-          </a:p>
-        </p:txBody>
-      </p:sp>
-      <p:sp>
-        <p:nvSpPr>
-          <p:cNvPr id="4" name="TextBox 3"/>
-          <p:cNvSpPr txBox="1"/>
-          <p:nvPr/>
-        </p:nvSpPr>
-        <p:spPr>
-          <a:xfrm>
-            <a:off x="822960" y="2880360"/>
-            <a:ext cx="9601200" cy="1371600"/>
-          </a:xfrm>
-          <a:prstGeom prst="rect">
-            <a:avLst/>
-          </a:prstGeom>
-          <a:noFill/>
-        </p:spPr>
-        <p:txBody>
-          <a:bodyPr wrap="square">
-            <a:spAutoFit/>
-          </a:bodyPr>
-          <a:lstStyle/>
-          <a:p>
-            <a:r>
-              <a:rPr sz="3400" b="1" i="0">
-                <a:solidFill>
-                  <a:srgbClr val="1A1A1A"/>
-                </a:solidFill>
-                <a:latin typeface="Arial"/>
-              </a:rPr>
-              <a:t>Who writes, who checks, who accepts</a:t>
-            </a:r>
-          </a:p>
-        </p:txBody>
-      </p:sp>
-      <p:sp>
-        <p:nvSpPr>
-          <p:cNvPr id="5" name="TextBox 4"/>
-          <p:cNvSpPr txBox="1"/>
-          <p:nvPr/>
-        </p:nvSpPr>
-        <p:spPr>
-          <a:xfrm>
-            <a:off x="822960" y="4343400"/>
-            <a:ext cx="9875520" cy="1554480"/>
-          </a:xfrm>
-          <a:prstGeom prst="rect">
-            <a:avLst/>
-          </a:prstGeom>
-          <a:noFill/>
-        </p:spPr>
-        <p:txBody>
-          <a:bodyPr wrap="square">
-            <a:spAutoFit/>
-          </a:bodyPr>
-          <a:lstStyle/>
-          <a:p>
-            <a:r>
-              <a:rPr sz="1700" b="0" i="1">
+              <a:t>An AI assistant can draft a register of requirements in an afternoon.</a:t>
+            </a:r>
+          </a:p>
+          <a:p>
+            <a:pPr>
+              <a:spcAft>
+                <a:spcPts val="800"/>
+              </a:spcAft>
+            </a:pPr>
+            <a:r>
+              <a:rPr sz="1700" b="0" i="0">
                 <a:solidFill>
                   <a:srgbClr val="595959"/>
                 </a:solidFill>
                 <a:latin typeface="Arial"/>
               </a:rPr>
-              <a:t>The AI assistant may draft; a named person accepts, amends or sets aside each proposal, and only what was accepted stands.</a:t>
-            </a:r>
-          </a:p>
-        </p:txBody>
-      </p:sp>
-      <p:sp>
-        <p:nvSpPr>
-          <p:cNvPr id="6" name="TextBox 5"/>
+              <a:t>That is real help. Your minister will still ask the question.</a:t>
+            </a:r>
+          </a:p>
+        </p:txBody>
+      </p:sp>
+      <p:sp>
+        <p:nvSpPr>
+          <p:cNvPr id="5" name="TextBox 4"/>
           <p:cNvSpPr txBox="1"/>
           <p:nvPr/>
         </p:nvSpPr>
         <p:spPr>
           <a:xfrm>
-            <a:off x="822960" y="5989320"/>
-            <a:ext cx="7315200" cy="365760"/>
+            <a:off x="457200" y="6473952"/>
+            <a:ext cx="7772400" cy="292608"/>
           </a:xfrm>
           <a:prstGeom prst="rect">
             <a:avLst/>
@@ -11795,13 +11970,48 @@
           <a:lstStyle/>
           <a:p>
             <a:r>
-              <a:rPr sz="1200" b="0" i="0">
+              <a:rPr sz="900" b="0" i="0">
                 <a:solidFill>
                   <a:srgbClr val="595959"/>
                 </a:solidFill>
                 <a:latin typeface="Arial"/>
               </a:rPr>
-              <a:t>standalone video · voice-over on text slides</a:t>
+              <a:t>1.5 · Who writes, who checks, who accepts</a:t>
+            </a:r>
+          </a:p>
+        </p:txBody>
+      </p:sp>
+      <p:sp>
+        <p:nvSpPr>
+          <p:cNvPr id="6" name="TextBox 5"/>
+          <p:cNvSpPr txBox="1"/>
+          <p:nvPr/>
+        </p:nvSpPr>
+        <p:spPr>
+          <a:xfrm>
+            <a:off x="10058400" y="6473952"/>
+            <a:ext cx="1673352" cy="292608"/>
+          </a:xfrm>
+          <a:prstGeom prst="rect">
+            <a:avLst/>
+          </a:prstGeom>
+          <a:noFill/>
+        </p:spPr>
+        <p:txBody>
+          <a:bodyPr wrap="square">
+            <a:spAutoFit/>
+          </a:bodyPr>
+          <a:lstStyle/>
+          <a:p>
+            <a:pPr algn="r"/>
+            <a:r>
+              <a:rPr sz="900" b="0" i="0">
+                <a:solidFill>
+                  <a:srgbClr val="595959"/>
+                </a:solidFill>
+                <a:latin typeface="Arial"/>
+              </a:rPr>
+              <a:t>www.itu.int</a:t>
             </a:r>
           </a:p>
         </p:txBody>
@@ -11826,14 +12036,58 @@
       <p:grpSpPr/>
       <p:sp>
         <p:nvSpPr>
-          <p:cNvPr id="2" name="TextBox 1"/>
+          <p:cNvPr id="2" name="Rectangle 1"/>
+          <p:cNvSpPr/>
+          <p:nvPr/>
+        </p:nvSpPr>
+        <p:spPr>
+          <a:xfrm>
+            <a:off x="457200" y="384048"/>
+            <a:ext cx="45720" cy="256032"/>
+          </a:xfrm>
+          <a:prstGeom prst="rect">
+            <a:avLst/>
+          </a:prstGeom>
+          <a:solidFill>
+            <a:srgbClr val="009CD6"/>
+          </a:solidFill>
+          <a:ln>
+            <a:noFill/>
+          </a:ln>
+          <a:effectLst/>
+        </p:spPr>
+        <p:style>
+          <a:lnRef idx="1">
+            <a:schemeClr val="accent1"/>
+          </a:lnRef>
+          <a:fillRef idx="3">
+            <a:schemeClr val="accent1"/>
+          </a:fillRef>
+          <a:effectRef idx="2">
+            <a:schemeClr val="accent1"/>
+          </a:effectRef>
+          <a:fontRef idx="minor">
+            <a:schemeClr val="lt1"/>
+          </a:fontRef>
+        </p:style>
+        <p:txBody>
+          <a:bodyPr rtlCol="0" anchor="ctr"/>
+          <a:lstStyle/>
+          <a:p>
+            <a:pPr algn="ctr"/>
+          </a:p>
+        </p:txBody>
+      </p:sp>
+      <p:sp>
+        <p:nvSpPr>
+          <p:cNvPr id="3" name="TextBox 2"/>
           <p:cNvSpPr txBox="1"/>
           <p:nvPr/>
         </p:nvSpPr>
         <p:spPr>
           <a:xfrm>
-            <a:off x="1005840" y="1325880"/>
-            <a:ext cx="5486400" cy="365760"/>
+            <a:off x="621792" y="274320"/>
+            <a:ext cx="11247120" cy="914400"/>
           </a:xfrm>
           <a:prstGeom prst="rect">
             <a:avLst/>
@@ -11847,47 +12101,13 @@
           <a:lstStyle/>
           <a:p>
             <a:r>
-              <a:rPr sz="1200" b="1" i="0">
-                <a:solidFill>
-                  <a:srgbClr val="006E96"/>
-                </a:solidFill>
-                <a:latin typeface="Arial"/>
-              </a:rPr>
-              <a:t>WHERE WE START</a:t>
-            </a:r>
-          </a:p>
-        </p:txBody>
-      </p:sp>
-      <p:sp>
-        <p:nvSpPr>
-          <p:cNvPr id="3" name="TextBox 2"/>
-          <p:cNvSpPr txBox="1"/>
-          <p:nvPr/>
-        </p:nvSpPr>
-        <p:spPr>
-          <a:xfrm>
-            <a:off x="1005840" y="1783080"/>
-            <a:ext cx="10149840" cy="1737360"/>
-          </a:xfrm>
-          <a:prstGeom prst="rect">
-            <a:avLst/>
-          </a:prstGeom>
-          <a:noFill/>
-        </p:spPr>
-        <p:txBody>
-          <a:bodyPr wrap="square">
-            <a:spAutoFit/>
-          </a:bodyPr>
-          <a:lstStyle/>
-          <a:p>
-            <a:r>
-              <a:rPr sz="3000" b="1" i="0">
+              <a:rPr sz="2800" b="1" i="0">
                 <a:solidFill>
                   <a:srgbClr val="1A1A1A"/>
                 </a:solidFill>
                 <a:latin typeface="Arial"/>
               </a:rPr>
-              <a:t>If a machine wrote it, who is answerable for it?</a:t>
+              <a:t>The assistant proposes; a person rules</a:t>
             </a:r>
           </a:p>
         </p:txBody>
@@ -11900,8 +12120,8 @@
         </p:nvSpPr>
         <p:spPr>
           <a:xfrm>
-            <a:off x="1005840" y="3611880"/>
-            <a:ext cx="10149840" cy="2377440"/>
+            <a:off x="658368" y="1463040"/>
+            <a:ext cx="10984687" cy="1005839"/>
           </a:xfrm>
           <a:prstGeom prst="rect">
             <a:avLst/>
@@ -11916,40 +12136,107 @@
           <a:p>
             <a:pPr>
               <a:spcAft>
-                <a:spcPts val="800"/>
+                <a:spcPts val="300"/>
               </a:spcAft>
             </a:pPr>
             <a:r>
-              <a:rPr sz="1700" b="0" i="0">
+              <a:rPr sz="2200" b="1" i="0">
                 <a:solidFill>
-                  <a:srgbClr val="595959"/>
+                  <a:srgbClr val="1A1A1A"/>
                 </a:solidFill>
                 <a:latin typeface="Arial"/>
               </a:rPr>
-              <a:t>An AI assistant can draft a register of requirements in an afternoon.</a:t>
-            </a:r>
-          </a:p>
+              <a:t>For each proposal: accepted, amended or set aside.</a:t>
+            </a:r>
+          </a:p>
+        </p:txBody>
+      </p:sp>
+      <p:sp>
+        <p:nvSpPr>
+          <p:cNvPr id="5" name="Rectangle 4"/>
+          <p:cNvSpPr/>
+          <p:nvPr/>
+        </p:nvSpPr>
+        <p:spPr>
+          <a:xfrm>
+            <a:off x="621792" y="2473452"/>
+            <a:ext cx="10881360" cy="12700"/>
+          </a:xfrm>
+          <a:prstGeom prst="rect">
+            <a:avLst/>
+          </a:prstGeom>
+          <a:solidFill>
+            <a:srgbClr val="DDECF4"/>
+          </a:solidFill>
+          <a:ln>
+            <a:noFill/>
+          </a:ln>
+          <a:effectLst/>
+        </p:spPr>
+        <p:style>
+          <a:lnRef idx="1">
+            <a:schemeClr val="accent1"/>
+          </a:lnRef>
+          <a:fillRef idx="3">
+            <a:schemeClr val="accent1"/>
+          </a:fillRef>
+          <a:effectRef idx="2">
+            <a:schemeClr val="accent1"/>
+          </a:effectRef>
+          <a:fontRef idx="minor">
+            <a:schemeClr val="lt1"/>
+          </a:fontRef>
+        </p:style>
+        <p:txBody>
+          <a:bodyPr rtlCol="0" anchor="ctr"/>
+          <a:lstStyle/>
+          <a:p>
+            <a:pPr algn="ctr"/>
+          </a:p>
+        </p:txBody>
+      </p:sp>
+      <p:sp>
+        <p:nvSpPr>
+          <p:cNvPr id="6" name="TextBox 5"/>
+          <p:cNvSpPr txBox="1"/>
+          <p:nvPr/>
+        </p:nvSpPr>
+        <p:spPr>
+          <a:xfrm>
+            <a:off x="658368" y="2514600"/>
+            <a:ext cx="10984687" cy="1005839"/>
+          </a:xfrm>
+          <a:prstGeom prst="rect">
+            <a:avLst/>
+          </a:prstGeom>
+          <a:noFill/>
+        </p:spPr>
+        <p:txBody>
+          <a:bodyPr wrap="square">
+            <a:spAutoFit/>
+          </a:bodyPr>
+          <a:lstStyle/>
           <a:p>
             <a:pPr>
               <a:spcAft>
-                <a:spcPts val="800"/>
+                <a:spcPts val="300"/>
               </a:spcAft>
             </a:pPr>
             <a:r>
-              <a:rPr sz="1700" b="0" i="0">
+              <a:rPr sz="2200" b="1" i="0">
                 <a:solidFill>
-                  <a:srgbClr val="595959"/>
+                  <a:srgbClr val="1A1A1A"/>
                 </a:solidFill>
                 <a:latin typeface="Arial"/>
               </a:rPr>
-              <a:t>That is real help. Your minister will still ask the question.</a:t>
-            </a:r>
-          </a:p>
-        </p:txBody>
-      </p:sp>
-      <p:sp>
-        <p:nvSpPr>
-          <p:cNvPr id="5" name="TextBox 4"/>
+              <a:t>The document holds only what was accepted.</a:t>
+            </a:r>
+          </a:p>
+        </p:txBody>
+      </p:sp>
+      <p:sp>
+        <p:nvSpPr>
+          <p:cNvPr id="7" name="TextBox 6"/>
           <p:cNvSpPr txBox="1"/>
           <p:nvPr/>
         </p:nvSpPr>
@@ -11977,41 +12264,6 @@
                 <a:latin typeface="Arial"/>
               </a:rPr>
               <a:t>1.5 · Who writes, who checks, who accepts</a:t>
-            </a:r>
-          </a:p>
-        </p:txBody>
-      </p:sp>
-      <p:sp>
-        <p:nvSpPr>
-          <p:cNvPr id="6" name="TextBox 5"/>
-          <p:cNvSpPr txBox="1"/>
-          <p:nvPr/>
-        </p:nvSpPr>
-        <p:spPr>
-          <a:xfrm>
-            <a:off x="10058400" y="6473952"/>
-            <a:ext cx="1673352" cy="292608"/>
-          </a:xfrm>
-          <a:prstGeom prst="rect">
-            <a:avLst/>
-          </a:prstGeom>
-          <a:noFill/>
-        </p:spPr>
-        <p:txBody>
-          <a:bodyPr wrap="square">
-            <a:spAutoFit/>
-          </a:bodyPr>
-          <a:lstStyle/>
-          <a:p>
-            <a:pPr algn="r"/>
-            <a:r>
-              <a:rPr sz="900" b="0" i="0">
-                <a:solidFill>
-                  <a:srgbClr val="595959"/>
-                </a:solidFill>
-                <a:latin typeface="Arial"/>
-              </a:rPr>
-              <a:t>www.itu.int</a:t>
             </a:r>
           </a:p>
         </p:txBody>
@@ -12107,7 +12359,7 @@
                 </a:solidFill>
                 <a:latin typeface="Arial"/>
               </a:rPr>
-              <a:t>The assistant proposes; a person rules</a:t>
+              <a:t>Where the source is silent, the assistant must say so</a:t>
             </a:r>
           </a:p>
         </p:txBody>
@@ -12146,7 +12398,7 @@
                 </a:solidFill>
                 <a:latin typeface="Arial"/>
               </a:rPr>
-              <a:t>For each proposal: accepted, amended or set aside.</a:t>
+              <a:t>A gap becomes a question with an owner.</a:t>
             </a:r>
           </a:p>
         </p:txBody>
@@ -12229,7 +12481,7 @@
                 </a:solidFill>
                 <a:latin typeface="Arial"/>
               </a:rPr>
-              <a:t>The document holds only what was accepted.</a:t>
+              <a:t>Never a plausible answer.</a:t>
             </a:r>
           </a:p>
         </p:txBody>
@@ -12359,7 +12611,7 @@
                 </a:solidFill>
                 <a:latin typeface="Arial"/>
               </a:rPr>
-              <a:t>Where the source is silent, the assistant must say so</a:t>
+              <a:t>Three roles for every document</a:t>
             </a:r>
           </a:p>
         </p:txBody>
@@ -12398,7 +12650,7 @@
                 </a:solidFill>
                 <a:latin typeface="Arial"/>
               </a:rPr>
-              <a:t>A gap becomes a question with an owner.</a:t>
+              <a:t>Writes. Checks. Accepts.</a:t>
             </a:r>
           </a:p>
         </p:txBody>
@@ -12481,14 +12733,97 @@
                 </a:solidFill>
                 <a:latin typeface="Arial"/>
               </a:rPr>
-              <a:t>Never a plausible answer.</a:t>
-            </a:r>
-          </a:p>
-        </p:txBody>
-      </p:sp>
-      <p:sp>
-        <p:nvSpPr>
-          <p:cNvPr id="7" name="TextBox 6"/>
+              <a:t>The writer never accepts alone.</a:t>
+            </a:r>
+          </a:p>
+        </p:txBody>
+      </p:sp>
+      <p:sp>
+        <p:nvSpPr>
+          <p:cNvPr id="7" name="Rectangle 6"/>
+          <p:cNvSpPr/>
+          <p:nvPr/>
+        </p:nvSpPr>
+        <p:spPr>
+          <a:xfrm>
+            <a:off x="621792" y="3525012"/>
+            <a:ext cx="10881360" cy="12700"/>
+          </a:xfrm>
+          <a:prstGeom prst="rect">
+            <a:avLst/>
+          </a:prstGeom>
+          <a:solidFill>
+            <a:srgbClr val="DDECF4"/>
+          </a:solidFill>
+          <a:ln>
+            <a:noFill/>
+          </a:ln>
+          <a:effectLst/>
+        </p:spPr>
+        <p:style>
+          <a:lnRef idx="1">
+            <a:schemeClr val="accent1"/>
+          </a:lnRef>
+          <a:fillRef idx="3">
+            <a:schemeClr val="accent1"/>
+          </a:fillRef>
+          <a:effectRef idx="2">
+            <a:schemeClr val="accent1"/>
+          </a:effectRef>
+          <a:fontRef idx="minor">
+            <a:schemeClr val="lt1"/>
+          </a:fontRef>
+        </p:style>
+        <p:txBody>
+          <a:bodyPr rtlCol="0" anchor="ctr"/>
+          <a:lstStyle/>
+          <a:p>
+            <a:pPr algn="ctr"/>
+          </a:p>
+        </p:txBody>
+      </p:sp>
+      <p:sp>
+        <p:nvSpPr>
+          <p:cNvPr id="8" name="TextBox 7"/>
+          <p:cNvSpPr txBox="1"/>
+          <p:nvPr/>
+        </p:nvSpPr>
+        <p:spPr>
+          <a:xfrm>
+            <a:off x="658368" y="3566160"/>
+            <a:ext cx="10984687" cy="1005839"/>
+          </a:xfrm>
+          <a:prstGeom prst="rect">
+            <a:avLst/>
+          </a:prstGeom>
+          <a:noFill/>
+        </p:spPr>
+        <p:txBody>
+          <a:bodyPr wrap="square">
+            <a:spAutoFit/>
+          </a:bodyPr>
+          <a:lstStyle/>
+          <a:p>
+            <a:pPr>
+              <a:spcAft>
+                <a:spcPts val="300"/>
+              </a:spcAft>
+            </a:pPr>
+            <a:r>
+              <a:rPr sz="2200" b="1" i="0">
+                <a:solidFill>
+                  <a:srgbClr val="1A1A1A"/>
+                </a:solidFill>
+                <a:latin typeface="Arial"/>
+              </a:rPr>
+              <a:t>The assistant never accepts.</a:t>
+            </a:r>
+          </a:p>
+        </p:txBody>
+      </p:sp>
+      <p:sp>
+        <p:nvSpPr>
+          <p:cNvPr id="9" name="TextBox 8"/>
           <p:cNvSpPr txBox="1"/>
           <p:nvPr/>
         </p:nvSpPr>
@@ -12611,7 +12946,7 @@
                 </a:solidFill>
                 <a:latin typeface="Arial"/>
               </a:rPr>
-              <a:t>Three roles for every document</a:t>
+              <a:t>Where the assistant writes, in PHEQA's project</a:t>
             </a:r>
           </a:p>
         </p:txBody>
@@ -12625,7 +12960,7 @@
         <p:spPr>
           <a:xfrm>
             <a:off x="658368" y="1463040"/>
-            <a:ext cx="10984687" cy="1005839"/>
+            <a:ext cx="10984687" cy="1131570"/>
           </a:xfrm>
           <a:prstGeom prst="rect">
             <a:avLst/>
@@ -12644,13 +12979,13 @@
               </a:spcAft>
             </a:pPr>
             <a:r>
-              <a:rPr sz="2200" b="1" i="0">
+              <a:rPr sz="1750" b="1" i="0">
                 <a:solidFill>
                   <a:srgbClr val="1A1A1A"/>
                 </a:solidFill>
                 <a:latin typeface="Arial"/>
               </a:rPr>
-              <a:t>Writes. Checks. Accepts.</a:t>
+              <a:t>The register: the assistant extracts; the analyst rules; the Registrar accepts.</a:t>
             </a:r>
           </a:p>
         </p:txBody>
@@ -12663,7 +12998,7 @@
         </p:nvSpPr>
         <p:spPr>
           <a:xfrm>
-            <a:off x="621792" y="2473452"/>
+            <a:off x="621792" y="2599182"/>
             <a:ext cx="10881360" cy="12700"/>
           </a:xfrm>
           <a:prstGeom prst="rect">
@@ -12707,8 +13042,8 @@
         </p:nvSpPr>
         <p:spPr>
           <a:xfrm>
-            <a:off x="658368" y="2514600"/>
-            <a:ext cx="10984687" cy="1005839"/>
+            <a:off x="658368" y="2640330"/>
+            <a:ext cx="10984687" cy="1131570"/>
           </a:xfrm>
           <a:prstGeom prst="rect">
             <a:avLst/>
@@ -12727,13 +13062,13 @@
               </a:spcAft>
             </a:pPr>
             <a:r>
-              <a:rPr sz="2200" b="1" i="0">
+              <a:rPr sz="1750" b="1" i="0">
                 <a:solidFill>
                   <a:srgbClr val="1A1A1A"/>
                 </a:solidFill>
                 <a:latin typeface="Arial"/>
               </a:rPr>
-              <a:t>The writer never accepts alone.</a:t>
+              <a:t>The shared settings and lists: the analyst with the assistant; the owner of each setting accepts.</a:t>
             </a:r>
           </a:p>
         </p:txBody>
@@ -12746,7 +13081,7 @@
         </p:nvSpPr>
         <p:spPr>
           <a:xfrm>
-            <a:off x="621792" y="3525012"/>
+            <a:off x="621792" y="3776472"/>
             <a:ext cx="10881360" cy="12700"/>
           </a:xfrm>
           <a:prstGeom prst="rect">
@@ -12790,8 +13125,8 @@
         </p:nvSpPr>
         <p:spPr>
           <a:xfrm>
-            <a:off x="658368" y="3566160"/>
-            <a:ext cx="10984687" cy="1005839"/>
+            <a:off x="658368" y="3817620"/>
+            <a:ext cx="10984687" cy="1131570"/>
           </a:xfrm>
           <a:prstGeom prst="rect">
             <a:avLst/>
@@ -12810,20 +13145,103 @@
               </a:spcAft>
             </a:pPr>
             <a:r>
-              <a:rPr sz="2200" b="1" i="0">
+              <a:rPr sz="1750" b="1" i="0">
                 <a:solidFill>
                   <a:srgbClr val="1A1A1A"/>
                 </a:solidFill>
                 <a:latin typeface="Arial"/>
               </a:rPr>
-              <a:t>The assistant never accepts.</a:t>
-            </a:r>
-          </a:p>
-        </p:txBody>
-      </p:sp>
-      <p:sp>
-        <p:nvSpPr>
-          <p:cNvPr id="9" name="TextBox 8"/>
+              <a:t>One goal as a story: the assistant drafts; the analyst rules; the Registrar accepts at the review.</a:t>
+            </a:r>
+          </a:p>
+        </p:txBody>
+      </p:sp>
+      <p:sp>
+        <p:nvSpPr>
+          <p:cNvPr id="9" name="Rectangle 8"/>
+          <p:cNvSpPr/>
+          <p:nvPr/>
+        </p:nvSpPr>
+        <p:spPr>
+          <a:xfrm>
+            <a:off x="621792" y="4953762"/>
+            <a:ext cx="10881360" cy="12700"/>
+          </a:xfrm>
+          <a:prstGeom prst="rect">
+            <a:avLst/>
+          </a:prstGeom>
+          <a:solidFill>
+            <a:srgbClr val="DDECF4"/>
+          </a:solidFill>
+          <a:ln>
+            <a:noFill/>
+          </a:ln>
+          <a:effectLst/>
+        </p:spPr>
+        <p:style>
+          <a:lnRef idx="1">
+            <a:schemeClr val="accent1"/>
+          </a:lnRef>
+          <a:fillRef idx="3">
+            <a:schemeClr val="accent1"/>
+          </a:fillRef>
+          <a:effectRef idx="2">
+            <a:schemeClr val="accent1"/>
+          </a:effectRef>
+          <a:fontRef idx="minor">
+            <a:schemeClr val="lt1"/>
+          </a:fontRef>
+        </p:style>
+        <p:txBody>
+          <a:bodyPr rtlCol="0" anchor="ctr"/>
+          <a:lstStyle/>
+          <a:p>
+            <a:pPr algn="ctr"/>
+          </a:p>
+        </p:txBody>
+      </p:sp>
+      <p:sp>
+        <p:nvSpPr>
+          <p:cNvPr id="10" name="TextBox 9"/>
+          <p:cNvSpPr txBox="1"/>
+          <p:nvPr/>
+        </p:nvSpPr>
+        <p:spPr>
+          <a:xfrm>
+            <a:off x="658368" y="4994910"/>
+            <a:ext cx="10984687" cy="1131570"/>
+          </a:xfrm>
+          <a:prstGeom prst="rect">
+            <a:avLst/>
+          </a:prstGeom>
+          <a:noFill/>
+        </p:spPr>
+        <p:txBody>
+          <a:bodyPr wrap="square">
+            <a:spAutoFit/>
+          </a:bodyPr>
+          <a:lstStyle/>
+          <a:p>
+            <a:pPr>
+              <a:spcAft>
+                <a:spcPts val="300"/>
+              </a:spcAft>
+            </a:pPr>
+            <a:r>
+              <a:rPr sz="1750" b="1" i="0">
+                <a:solidFill>
+                  <a:srgbClr val="1A1A1A"/>
+                </a:solidFill>
+                <a:latin typeface="Arial"/>
+              </a:rPr>
+              <a:t>The application model: the assistant writes and must refuse to guess; the head of the ICT unit accepts.</a:t>
+            </a:r>
+          </a:p>
+        </p:txBody>
+      </p:sp>
+      <p:sp>
+        <p:nvSpPr>
+          <p:cNvPr id="11" name="TextBox 10"/>
           <p:cNvSpPr txBox="1"/>
           <p:nvPr/>
         </p:nvSpPr>
@@ -12946,66 +13364,27 @@
                 </a:solidFill>
                 <a:latin typeface="Arial"/>
               </a:rPr>
-              <a:t>Where the assistant writes, in PHEQA's project</a:t>
-            </a:r>
-          </a:p>
-        </p:txBody>
-      </p:sp>
-      <p:sp>
-        <p:nvSpPr>
-          <p:cNvPr id="4" name="TextBox 3"/>
-          <p:cNvSpPr txBox="1"/>
-          <p:nvPr/>
-        </p:nvSpPr>
-        <p:spPr>
-          <a:xfrm>
-            <a:off x="658368" y="1463040"/>
-            <a:ext cx="10984687" cy="1131570"/>
-          </a:xfrm>
-          <a:prstGeom prst="rect">
-            <a:avLst/>
-          </a:prstGeom>
-          <a:noFill/>
-        </p:spPr>
-        <p:txBody>
-          <a:bodyPr wrap="square">
-            <a:spAutoFit/>
-          </a:bodyPr>
-          <a:lstStyle/>
-          <a:p>
-            <a:pPr>
-              <a:spcAft>
-                <a:spcPts val="300"/>
-              </a:spcAft>
-            </a:pPr>
-            <a:r>
-              <a:rPr sz="1750" b="1" i="0">
-                <a:solidFill>
-                  <a:srgbClr val="1A1A1A"/>
-                </a:solidFill>
-                <a:latin typeface="Arial"/>
-              </a:rPr>
-              <a:t>The register: the assistant extracts; the analyst rules; the Registrar accepts.</a:t>
-            </a:r>
-          </a:p>
-        </p:txBody>
-      </p:sp>
-      <p:sp>
-        <p:nvSpPr>
-          <p:cNvPr id="5" name="Rectangle 4"/>
+              <a:t>Three checks on the table</a:t>
+            </a:r>
+          </a:p>
+        </p:txBody>
+      </p:sp>
+      <p:sp>
+        <p:nvSpPr>
+          <p:cNvPr id="4" name="Oval 3"/>
           <p:cNvSpPr/>
           <p:nvPr/>
         </p:nvSpPr>
         <p:spPr>
           <a:xfrm>
-            <a:off x="621792" y="2599182"/>
-            <a:ext cx="10881360" cy="12700"/>
-          </a:xfrm>
-          <a:prstGeom prst="rect">
+            <a:off x="621792" y="1508760"/>
+            <a:ext cx="310896" cy="310896"/>
+          </a:xfrm>
+          <a:prstGeom prst="ellipse">
             <a:avLst/>
           </a:prstGeom>
           <a:solidFill>
-            <a:srgbClr val="DDECF4"/>
+            <a:srgbClr val="009CD6"/>
           </a:solidFill>
           <a:ln>
             <a:noFill/>
@@ -13027,23 +13406,32 @@
           </a:fontRef>
         </p:style>
         <p:txBody>
-          <a:bodyPr rtlCol="0" anchor="ctr"/>
+          <a:bodyPr rtlCol="0" anchor="ctr" lIns="0" rIns="0" tIns="0" bIns="0" wrap="square"/>
           <a:lstStyle/>
           <a:p>
             <a:pPr algn="ctr"/>
-          </a:p>
-        </p:txBody>
-      </p:sp>
-      <p:sp>
-        <p:nvSpPr>
-          <p:cNvPr id="6" name="TextBox 5"/>
+            <a:r>
+              <a:rPr sz="1300" b="1" i="0">
+                <a:solidFill>
+                  <a:srgbClr val="FFFFFF"/>
+                </a:solidFill>
+                <a:latin typeface="Arial"/>
+              </a:rPr>
+              <a:t>1</a:t>
+            </a:r>
+          </a:p>
+        </p:txBody>
+      </p:sp>
+      <p:sp>
+        <p:nvSpPr>
+          <p:cNvPr id="5" name="TextBox 4"/>
           <p:cNvSpPr txBox="1"/>
           <p:nvPr/>
         </p:nvSpPr>
         <p:spPr>
           <a:xfrm>
-            <a:off x="658368" y="2640330"/>
-            <a:ext cx="10984687" cy="1131570"/>
+            <a:off x="1115568" y="1463040"/>
+            <a:ext cx="10527487" cy="1005839"/>
           </a:xfrm>
           <a:prstGeom prst="rect">
             <a:avLst/>
@@ -13062,26 +13450,26 @@
               </a:spcAft>
             </a:pPr>
             <a:r>
-              <a:rPr sz="1750" b="1" i="0">
+              <a:rPr sz="2200" b="1" i="0">
                 <a:solidFill>
                   <a:srgbClr val="1A1A1A"/>
                 </a:solidFill>
                 <a:latin typeface="Arial"/>
               </a:rPr>
-              <a:t>The shared settings and lists: the analyst with the assistant; the owner of each setting accepts.</a:t>
-            </a:r>
-          </a:p>
-        </p:txBody>
-      </p:sp>
-      <p:sp>
-        <p:nvSpPr>
-          <p:cNvPr id="7" name="Rectangle 6"/>
+              <a:t>No row ends with the assistant.</a:t>
+            </a:r>
+          </a:p>
+        </p:txBody>
+      </p:sp>
+      <p:sp>
+        <p:nvSpPr>
+          <p:cNvPr id="6" name="Rectangle 5"/>
           <p:cNvSpPr/>
           <p:nvPr/>
         </p:nvSpPr>
         <p:spPr>
           <a:xfrm>
-            <a:off x="621792" y="3776472"/>
+            <a:off x="621792" y="2473452"/>
             <a:ext cx="10881360" cy="12700"/>
           </a:xfrm>
           <a:prstGeom prst="rect">
@@ -13119,59 +13507,20 @@
       </p:sp>
       <p:sp>
         <p:nvSpPr>
-          <p:cNvPr id="8" name="TextBox 7"/>
-          <p:cNvSpPr txBox="1"/>
-          <p:nvPr/>
-        </p:nvSpPr>
-        <p:spPr>
-          <a:xfrm>
-            <a:off x="658368" y="3817620"/>
-            <a:ext cx="10984687" cy="1131570"/>
-          </a:xfrm>
-          <a:prstGeom prst="rect">
-            <a:avLst/>
-          </a:prstGeom>
-          <a:noFill/>
-        </p:spPr>
-        <p:txBody>
-          <a:bodyPr wrap="square">
-            <a:spAutoFit/>
-          </a:bodyPr>
-          <a:lstStyle/>
-          <a:p>
-            <a:pPr>
-              <a:spcAft>
-                <a:spcPts val="300"/>
-              </a:spcAft>
-            </a:pPr>
-            <a:r>
-              <a:rPr sz="1750" b="1" i="0">
-                <a:solidFill>
-                  <a:srgbClr val="1A1A1A"/>
-                </a:solidFill>
-                <a:latin typeface="Arial"/>
-              </a:rPr>
-              <a:t>One goal as a story: the assistant drafts; the analyst rules; the Registrar accepts at the review.</a:t>
-            </a:r>
-          </a:p>
-        </p:txBody>
-      </p:sp>
-      <p:sp>
-        <p:nvSpPr>
-          <p:cNvPr id="9" name="Rectangle 8"/>
+          <p:cNvPr id="7" name="Oval 6"/>
           <p:cNvSpPr/>
           <p:nvPr/>
         </p:nvSpPr>
         <p:spPr>
           <a:xfrm>
-            <a:off x="621792" y="4953762"/>
-            <a:ext cx="10881360" cy="12700"/>
-          </a:xfrm>
-          <a:prstGeom prst="rect">
+            <a:off x="621792" y="2560320"/>
+            <a:ext cx="310896" cy="310896"/>
+          </a:xfrm>
+          <a:prstGeom prst="ellipse">
             <a:avLst/>
           </a:prstGeom>
           <a:solidFill>
-            <a:srgbClr val="DDECF4"/>
+            <a:srgbClr val="009CD6"/>
           </a:solidFill>
           <a:ln>
             <a:noFill/>
@@ -13193,23 +13542,32 @@
           </a:fontRef>
         </p:style>
         <p:txBody>
-          <a:bodyPr rtlCol="0" anchor="ctr"/>
+          <a:bodyPr rtlCol="0" anchor="ctr" lIns="0" rIns="0" tIns="0" bIns="0" wrap="square"/>
           <a:lstStyle/>
           <a:p>
             <a:pPr algn="ctr"/>
-          </a:p>
-        </p:txBody>
-      </p:sp>
-      <p:sp>
-        <p:nvSpPr>
-          <p:cNvPr id="10" name="TextBox 9"/>
+            <a:r>
+              <a:rPr sz="1300" b="1" i="0">
+                <a:solidFill>
+                  <a:srgbClr val="FFFFFF"/>
+                </a:solidFill>
+                <a:latin typeface="Arial"/>
+              </a:rPr>
+              <a:t>2</a:t>
+            </a:r>
+          </a:p>
+        </p:txBody>
+      </p:sp>
+      <p:sp>
+        <p:nvSpPr>
+          <p:cNvPr id="8" name="TextBox 7"/>
           <p:cNvSpPr txBox="1"/>
           <p:nvPr/>
         </p:nvSpPr>
         <p:spPr>
           <a:xfrm>
-            <a:off x="658368" y="4994910"/>
-            <a:ext cx="10984687" cy="1131570"/>
+            <a:off x="1115568" y="2514600"/>
+            <a:ext cx="10527487" cy="1005839"/>
           </a:xfrm>
           <a:prstGeom prst="rect">
             <a:avLst/>
@@ -13228,85 +13586,33 @@
               </a:spcAft>
             </a:pPr>
             <a:r>
-              <a:rPr sz="1750" b="1" i="0">
+              <a:rPr sz="2200" b="1" i="0">
                 <a:solidFill>
                   <a:srgbClr val="1A1A1A"/>
                 </a:solidFill>
                 <a:latin typeface="Arial"/>
               </a:rPr>
-              <a:t>The application model: the assistant writes and must refuse to guess; the head of the ICT unit accepts.</a:t>
-            </a:r>
-          </a:p>
-        </p:txBody>
-      </p:sp>
-      <p:sp>
-        <p:nvSpPr>
-          <p:cNvPr id="11" name="TextBox 10"/>
-          <p:cNvSpPr txBox="1"/>
-          <p:nvPr/>
-        </p:nvSpPr>
-        <p:spPr>
-          <a:xfrm>
-            <a:off x="457200" y="6473952"/>
-            <a:ext cx="7772400" cy="292608"/>
-          </a:xfrm>
-          <a:prstGeom prst="rect">
-            <a:avLst/>
-          </a:prstGeom>
-          <a:noFill/>
-        </p:spPr>
-        <p:txBody>
-          <a:bodyPr wrap="square">
-            <a:spAutoFit/>
-          </a:bodyPr>
-          <a:lstStyle/>
-          <a:p>
-            <a:r>
-              <a:rPr sz="900" b="0" i="0">
-                <a:solidFill>
-                  <a:srgbClr val="595959"/>
-                </a:solidFill>
-                <a:latin typeface="Arial"/>
-              </a:rPr>
-              <a:t>1.5 · Who writes, who checks, who accepts</a:t>
-            </a:r>
-          </a:p>
-        </p:txBody>
-      </p:sp>
-    </p:spTree>
-  </p:cSld>
-  <p:clrMapOvr>
-    <a:masterClrMapping/>
-  </p:clrMapOvr>
-</p:sld>
-</file>
-
-<file path=ppt/slides/slide42.xml><?xml version="1.0" encoding="utf-8"?>
-<p:sld xmlns:a="http://schemas.openxmlformats.org/drawingml/2006/main" xmlns:p="http://schemas.openxmlformats.org/presentationml/2006/main" xmlns:r="http://schemas.openxmlformats.org/officeDocument/2006/relationships">
-  <p:cSld>
-    <p:spTree>
-      <p:nvGrpSpPr>
-        <p:cNvPr id="1" name=""/>
-        <p:cNvGrpSpPr/>
-        <p:nvPr/>
-      </p:nvGrpSpPr>
-      <p:grpSpPr/>
-      <p:sp>
-        <p:nvSpPr>
-          <p:cNvPr id="2" name="Rectangle 1"/>
+              <a:t>The writer never accepts alone.</a:t>
+            </a:r>
+          </a:p>
+        </p:txBody>
+      </p:sp>
+      <p:sp>
+        <p:nvSpPr>
+          <p:cNvPr id="9" name="Rectangle 8"/>
           <p:cNvSpPr/>
           <p:nvPr/>
         </p:nvSpPr>
         <p:spPr>
           <a:xfrm>
-            <a:off x="457200" y="384048"/>
-            <a:ext cx="45720" cy="256032"/>
+            <a:off x="621792" y="3525012"/>
+            <a:ext cx="10881360" cy="12700"/>
           </a:xfrm>
           <a:prstGeom prst="rect">
             <a:avLst/>
           </a:prstGeom>
           <a:solidFill>
-            <a:srgbClr val="009CD6"/>
+            <a:srgbClr val="DDECF4"/>
           </a:solidFill>
           <a:ln>
             <a:noFill/>
@@ -13337,47 +13643,13 @@
       </p:sp>
       <p:sp>
         <p:nvSpPr>
-          <p:cNvPr id="3" name="TextBox 2"/>
-          <p:cNvSpPr txBox="1"/>
-          <p:nvPr/>
-        </p:nvSpPr>
-        <p:spPr>
-          <a:xfrm>
-            <a:off x="621792" y="274320"/>
-            <a:ext cx="11247120" cy="914400"/>
-          </a:xfrm>
-          <a:prstGeom prst="rect">
-            <a:avLst/>
-          </a:prstGeom>
-          <a:noFill/>
-        </p:spPr>
-        <p:txBody>
-          <a:bodyPr wrap="square">
-            <a:spAutoFit/>
-          </a:bodyPr>
-          <a:lstStyle/>
-          <a:p>
-            <a:r>
-              <a:rPr sz="2800" b="1" i="0">
-                <a:solidFill>
-                  <a:srgbClr val="1A1A1A"/>
-                </a:solidFill>
-                <a:latin typeface="Arial"/>
-              </a:rPr>
-              <a:t>Three checks on the table</a:t>
-            </a:r>
-          </a:p>
-        </p:txBody>
-      </p:sp>
-      <p:sp>
-        <p:nvSpPr>
-          <p:cNvPr id="4" name="Oval 3"/>
+          <p:cNvPr id="10" name="Oval 9"/>
           <p:cNvSpPr/>
           <p:nvPr/>
         </p:nvSpPr>
         <p:spPr>
           <a:xfrm>
-            <a:off x="621792" y="1508760"/>
+            <a:off x="621792" y="3611879"/>
             <a:ext cx="310896" cy="310896"/>
           </a:xfrm>
           <a:prstGeom prst="ellipse">
@@ -13417,278 +13689,6 @@
                 </a:solidFill>
                 <a:latin typeface="Arial"/>
               </a:rPr>
-              <a:t>1</a:t>
-            </a:r>
-          </a:p>
-        </p:txBody>
-      </p:sp>
-      <p:sp>
-        <p:nvSpPr>
-          <p:cNvPr id="5" name="TextBox 4"/>
-          <p:cNvSpPr txBox="1"/>
-          <p:nvPr/>
-        </p:nvSpPr>
-        <p:spPr>
-          <a:xfrm>
-            <a:off x="1115568" y="1463040"/>
-            <a:ext cx="10527487" cy="1005839"/>
-          </a:xfrm>
-          <a:prstGeom prst="rect">
-            <a:avLst/>
-          </a:prstGeom>
-          <a:noFill/>
-        </p:spPr>
-        <p:txBody>
-          <a:bodyPr wrap="square">
-            <a:spAutoFit/>
-          </a:bodyPr>
-          <a:lstStyle/>
-          <a:p>
-            <a:pPr>
-              <a:spcAft>
-                <a:spcPts val="300"/>
-              </a:spcAft>
-            </a:pPr>
-            <a:r>
-              <a:rPr sz="2200" b="1" i="0">
-                <a:solidFill>
-                  <a:srgbClr val="1A1A1A"/>
-                </a:solidFill>
-                <a:latin typeface="Arial"/>
-              </a:rPr>
-              <a:t>No row ends with the assistant.</a:t>
-            </a:r>
-          </a:p>
-        </p:txBody>
-      </p:sp>
-      <p:sp>
-        <p:nvSpPr>
-          <p:cNvPr id="6" name="Rectangle 5"/>
-          <p:cNvSpPr/>
-          <p:nvPr/>
-        </p:nvSpPr>
-        <p:spPr>
-          <a:xfrm>
-            <a:off x="621792" y="2473452"/>
-            <a:ext cx="10881360" cy="12700"/>
-          </a:xfrm>
-          <a:prstGeom prst="rect">
-            <a:avLst/>
-          </a:prstGeom>
-          <a:solidFill>
-            <a:srgbClr val="DDECF4"/>
-          </a:solidFill>
-          <a:ln>
-            <a:noFill/>
-          </a:ln>
-          <a:effectLst/>
-        </p:spPr>
-        <p:style>
-          <a:lnRef idx="1">
-            <a:schemeClr val="accent1"/>
-          </a:lnRef>
-          <a:fillRef idx="3">
-            <a:schemeClr val="accent1"/>
-          </a:fillRef>
-          <a:effectRef idx="2">
-            <a:schemeClr val="accent1"/>
-          </a:effectRef>
-          <a:fontRef idx="minor">
-            <a:schemeClr val="lt1"/>
-          </a:fontRef>
-        </p:style>
-        <p:txBody>
-          <a:bodyPr rtlCol="0" anchor="ctr"/>
-          <a:lstStyle/>
-          <a:p>
-            <a:pPr algn="ctr"/>
-          </a:p>
-        </p:txBody>
-      </p:sp>
-      <p:sp>
-        <p:nvSpPr>
-          <p:cNvPr id="7" name="Oval 6"/>
-          <p:cNvSpPr/>
-          <p:nvPr/>
-        </p:nvSpPr>
-        <p:spPr>
-          <a:xfrm>
-            <a:off x="621792" y="2560320"/>
-            <a:ext cx="310896" cy="310896"/>
-          </a:xfrm>
-          <a:prstGeom prst="ellipse">
-            <a:avLst/>
-          </a:prstGeom>
-          <a:solidFill>
-            <a:srgbClr val="009CD6"/>
-          </a:solidFill>
-          <a:ln>
-            <a:noFill/>
-          </a:ln>
-          <a:effectLst/>
-        </p:spPr>
-        <p:style>
-          <a:lnRef idx="1">
-            <a:schemeClr val="accent1"/>
-          </a:lnRef>
-          <a:fillRef idx="3">
-            <a:schemeClr val="accent1"/>
-          </a:fillRef>
-          <a:effectRef idx="2">
-            <a:schemeClr val="accent1"/>
-          </a:effectRef>
-          <a:fontRef idx="minor">
-            <a:schemeClr val="lt1"/>
-          </a:fontRef>
-        </p:style>
-        <p:txBody>
-          <a:bodyPr rtlCol="0" anchor="ctr" lIns="0" rIns="0" tIns="0" bIns="0" wrap="square"/>
-          <a:lstStyle/>
-          <a:p>
-            <a:pPr algn="ctr"/>
-            <a:r>
-              <a:rPr sz="1300" b="1" i="0">
-                <a:solidFill>
-                  <a:srgbClr val="FFFFFF"/>
-                </a:solidFill>
-                <a:latin typeface="Arial"/>
-              </a:rPr>
-              <a:t>2</a:t>
-            </a:r>
-          </a:p>
-        </p:txBody>
-      </p:sp>
-      <p:sp>
-        <p:nvSpPr>
-          <p:cNvPr id="8" name="TextBox 7"/>
-          <p:cNvSpPr txBox="1"/>
-          <p:nvPr/>
-        </p:nvSpPr>
-        <p:spPr>
-          <a:xfrm>
-            <a:off x="1115568" y="2514600"/>
-            <a:ext cx="10527487" cy="1005839"/>
-          </a:xfrm>
-          <a:prstGeom prst="rect">
-            <a:avLst/>
-          </a:prstGeom>
-          <a:noFill/>
-        </p:spPr>
-        <p:txBody>
-          <a:bodyPr wrap="square">
-            <a:spAutoFit/>
-          </a:bodyPr>
-          <a:lstStyle/>
-          <a:p>
-            <a:pPr>
-              <a:spcAft>
-                <a:spcPts val="300"/>
-              </a:spcAft>
-            </a:pPr>
-            <a:r>
-              <a:rPr sz="2200" b="1" i="0">
-                <a:solidFill>
-                  <a:srgbClr val="1A1A1A"/>
-                </a:solidFill>
-                <a:latin typeface="Arial"/>
-              </a:rPr>
-              <a:t>The writer never accepts alone.</a:t>
-            </a:r>
-          </a:p>
-        </p:txBody>
-      </p:sp>
-      <p:sp>
-        <p:nvSpPr>
-          <p:cNvPr id="9" name="Rectangle 8"/>
-          <p:cNvSpPr/>
-          <p:nvPr/>
-        </p:nvSpPr>
-        <p:spPr>
-          <a:xfrm>
-            <a:off x="621792" y="3525012"/>
-            <a:ext cx="10881360" cy="12700"/>
-          </a:xfrm>
-          <a:prstGeom prst="rect">
-            <a:avLst/>
-          </a:prstGeom>
-          <a:solidFill>
-            <a:srgbClr val="DDECF4"/>
-          </a:solidFill>
-          <a:ln>
-            <a:noFill/>
-          </a:ln>
-          <a:effectLst/>
-        </p:spPr>
-        <p:style>
-          <a:lnRef idx="1">
-            <a:schemeClr val="accent1"/>
-          </a:lnRef>
-          <a:fillRef idx="3">
-            <a:schemeClr val="accent1"/>
-          </a:fillRef>
-          <a:effectRef idx="2">
-            <a:schemeClr val="accent1"/>
-          </a:effectRef>
-          <a:fontRef idx="minor">
-            <a:schemeClr val="lt1"/>
-          </a:fontRef>
-        </p:style>
-        <p:txBody>
-          <a:bodyPr rtlCol="0" anchor="ctr"/>
-          <a:lstStyle/>
-          <a:p>
-            <a:pPr algn="ctr"/>
-          </a:p>
-        </p:txBody>
-      </p:sp>
-      <p:sp>
-        <p:nvSpPr>
-          <p:cNvPr id="10" name="Oval 9"/>
-          <p:cNvSpPr/>
-          <p:nvPr/>
-        </p:nvSpPr>
-        <p:spPr>
-          <a:xfrm>
-            <a:off x="621792" y="3611879"/>
-            <a:ext cx="310896" cy="310896"/>
-          </a:xfrm>
-          <a:prstGeom prst="ellipse">
-            <a:avLst/>
-          </a:prstGeom>
-          <a:solidFill>
-            <a:srgbClr val="009CD6"/>
-          </a:solidFill>
-          <a:ln>
-            <a:noFill/>
-          </a:ln>
-          <a:effectLst/>
-        </p:spPr>
-        <p:style>
-          <a:lnRef idx="1">
-            <a:schemeClr val="accent1"/>
-          </a:lnRef>
-          <a:fillRef idx="3">
-            <a:schemeClr val="accent1"/>
-          </a:fillRef>
-          <a:effectRef idx="2">
-            <a:schemeClr val="accent1"/>
-          </a:effectRef>
-          <a:fontRef idx="minor">
-            <a:schemeClr val="lt1"/>
-          </a:fontRef>
-        </p:style>
-        <p:txBody>
-          <a:bodyPr rtlCol="0" anchor="ctr" lIns="0" rIns="0" tIns="0" bIns="0" wrap="square"/>
-          <a:lstStyle/>
-          <a:p>
-            <a:pPr algn="ctr"/>
-            <a:r>
-              <a:rPr sz="1300" b="1" i="0">
-                <a:solidFill>
-                  <a:srgbClr val="FFFFFF"/>
-                </a:solidFill>
-                <a:latin typeface="Arial"/>
-              </a:rPr>
               <a:t>3</a:t>
             </a:r>
           </a:p>
@@ -13775,7 +13775,7 @@
 </p:sld>
 </file>
 
-<file path=ppt/slides/slide43.xml><?xml version="1.0" encoding="utf-8"?>
+<file path=ppt/slides/slide42.xml><?xml version="1.0" encoding="utf-8"?>
 <p:sld xmlns:a="http://schemas.openxmlformats.org/drawingml/2006/main" xmlns:p="http://schemas.openxmlformats.org/presentationml/2006/main" xmlns:r="http://schemas.openxmlformats.org/officeDocument/2006/relationships">
   <p:cSld>
     <p:spTree>
